--- a/Omnisec-Analyzer-Presentation.pptx
+++ b/Omnisec-Analyzer-Presentation.pptx
@@ -3465,7 +3465,7 @@
         <p:spPr>
           <a:xfrm>
             <a:off x="731520" y="365760"/>
-            <a:ext cx="10058400" cy="640080"/>
+            <a:ext cx="10058400" cy="584775"/>
           </a:xfrm>
           <a:prstGeom prst="rect">
             <a:avLst/>
@@ -3478,7 +3478,7 @@
           </a:bodyPr>
           <a:lstStyle/>
           <a:p>
-            <a:pPr algn="l">
+            <a:pPr>
               <a:defRPr sz="3200" b="1">
                 <a:solidFill>
                   <a:srgbClr val="FFFFFF"/>
@@ -3487,7 +3487,20 @@
               </a:defRPr>
             </a:pPr>
             <a:r>
-              <a:t>What Is CyberSentinel AI?</a:t>
+              <a:rPr dirty="0"/>
+              <a:t>What Is </a:t>
+            </a:r>
+            <a:r>
+              <a:rPr lang="en-IN" dirty="0" err="1"/>
+              <a:t>Omnisec</a:t>
+            </a:r>
+            <a:r>
+              <a:rPr lang="en-IN" dirty="0"/>
+              <a:t> Analyzer</a:t>
+            </a:r>
+            <a:r>
+              <a:rPr dirty="0"/>
+              <a:t>?</a:t>
             </a:r>
           </a:p>
         </p:txBody>
@@ -6884,7 +6897,7 @@
         <p:spPr>
           <a:xfrm>
             <a:off x="1371600" y="2377440"/>
-            <a:ext cx="9144000" cy="548640"/>
+            <a:ext cx="9144000" cy="430887"/>
           </a:xfrm>
           <a:prstGeom prst="rect">
             <a:avLst/>
@@ -6906,7 +6919,16 @@
               </a:defRPr>
             </a:pPr>
             <a:r>
-              <a:t>CyberSentinel AI — Detect. Analyze. Protect.</a:t>
+              <a:rPr lang="en-IN" dirty="0" err="1"/>
+              <a:t>Omnisec</a:t>
+            </a:r>
+            <a:r>
+              <a:rPr lang="en-IN" dirty="0"/>
+              <a:t> Analyzer</a:t>
+            </a:r>
+            <a:r>
+              <a:rPr dirty="0"/>
+              <a:t>— Detect. Analyze. Protect.</a:t>
             </a:r>
           </a:p>
         </p:txBody>

--- a/Omnisec-Analyzer-Presentation.pptx
+++ b/Omnisec-Analyzer-Presentation.pptx
@@ -307,7 +307,7 @@
           <a:p>
             <a:fld id="{5BCAD085-E8A6-8845-BD4E-CB4CCA059FC4}" type="datetimeFigureOut">
               <a:rPr lang="en-US" smtClean="0"/>
-              <a:t>10/9/2026</a:t>
+              <a:t>10/10/2026</a:t>
             </a:fld>
             <a:endParaRPr lang="en-US"/>
           </a:p>
@@ -475,7 +475,7 @@
           <a:p>
             <a:fld id="{5BCAD085-E8A6-8845-BD4E-CB4CCA059FC4}" type="datetimeFigureOut">
               <a:rPr lang="en-US" smtClean="0"/>
-              <a:t>10/9/2026</a:t>
+              <a:t>10/10/2026</a:t>
             </a:fld>
             <a:endParaRPr lang="en-US"/>
           </a:p>
@@ -653,7 +653,7 @@
           <a:p>
             <a:fld id="{5BCAD085-E8A6-8845-BD4E-CB4CCA059FC4}" type="datetimeFigureOut">
               <a:rPr lang="en-US" smtClean="0"/>
-              <a:t>10/9/2026</a:t>
+              <a:t>10/10/2026</a:t>
             </a:fld>
             <a:endParaRPr lang="en-US"/>
           </a:p>
@@ -821,7 +821,7 @@
           <a:p>
             <a:fld id="{5BCAD085-E8A6-8845-BD4E-CB4CCA059FC4}" type="datetimeFigureOut">
               <a:rPr lang="en-US" smtClean="0"/>
-              <a:t>10/9/2026</a:t>
+              <a:t>10/10/2026</a:t>
             </a:fld>
             <a:endParaRPr lang="en-US"/>
           </a:p>
@@ -1066,7 +1066,7 @@
           <a:p>
             <a:fld id="{5BCAD085-E8A6-8845-BD4E-CB4CCA059FC4}" type="datetimeFigureOut">
               <a:rPr lang="en-US" smtClean="0"/>
-              <a:t>10/9/2026</a:t>
+              <a:t>10/10/2026</a:t>
             </a:fld>
             <a:endParaRPr lang="en-US"/>
           </a:p>
@@ -1351,7 +1351,7 @@
           <a:p>
             <a:fld id="{5BCAD085-E8A6-8845-BD4E-CB4CCA059FC4}" type="datetimeFigureOut">
               <a:rPr lang="en-US" smtClean="0"/>
-              <a:t>10/9/2026</a:t>
+              <a:t>10/10/2026</a:t>
             </a:fld>
             <a:endParaRPr lang="en-US"/>
           </a:p>
@@ -1770,7 +1770,7 @@
           <a:p>
             <a:fld id="{5BCAD085-E8A6-8845-BD4E-CB4CCA059FC4}" type="datetimeFigureOut">
               <a:rPr lang="en-US" smtClean="0"/>
-              <a:t>10/9/2026</a:t>
+              <a:t>10/10/2026</a:t>
             </a:fld>
             <a:endParaRPr lang="en-US"/>
           </a:p>
@@ -1887,7 +1887,7 @@
           <a:p>
             <a:fld id="{5BCAD085-E8A6-8845-BD4E-CB4CCA059FC4}" type="datetimeFigureOut">
               <a:rPr lang="en-US" smtClean="0"/>
-              <a:t>10/9/2026</a:t>
+              <a:t>10/10/2026</a:t>
             </a:fld>
             <a:endParaRPr lang="en-US"/>
           </a:p>
@@ -1982,7 +1982,7 @@
           <a:p>
             <a:fld id="{5BCAD085-E8A6-8845-BD4E-CB4CCA059FC4}" type="datetimeFigureOut">
               <a:rPr lang="en-US" smtClean="0"/>
-              <a:t>10/9/2026</a:t>
+              <a:t>10/10/2026</a:t>
             </a:fld>
             <a:endParaRPr lang="en-US"/>
           </a:p>
@@ -2257,7 +2257,7 @@
           <a:p>
             <a:fld id="{5BCAD085-E8A6-8845-BD4E-CB4CCA059FC4}" type="datetimeFigureOut">
               <a:rPr lang="en-US" smtClean="0"/>
-              <a:t>10/9/2026</a:t>
+              <a:t>10/10/2026</a:t>
             </a:fld>
             <a:endParaRPr lang="en-US"/>
           </a:p>
@@ -2509,7 +2509,7 @@
           <a:p>
             <a:fld id="{5BCAD085-E8A6-8845-BD4E-CB4CCA059FC4}" type="datetimeFigureOut">
               <a:rPr lang="en-US" smtClean="0"/>
-              <a:t>10/9/2026</a:t>
+              <a:t>10/10/2026</a:t>
             </a:fld>
             <a:endParaRPr lang="en-US"/>
           </a:p>
@@ -2720,7 +2720,7 @@
           <a:p>
             <a:fld id="{5BCAD085-E8A6-8845-BD4E-CB4CCA059FC4}" type="datetimeFigureOut">
               <a:rPr lang="en-US" smtClean="0"/>
-              <a:t>10/9/2026</a:t>
+              <a:t>10/10/2026</a:t>
             </a:fld>
             <a:endParaRPr lang="en-US"/>
           </a:p>
@@ -3169,23 +3169,9 @@
           </a:bodyPr>
           <a:lstStyle/>
           <a:p>
-            <a:pPr algn="ctr">
-              <a:defRPr sz="5200" b="1">
-                <a:solidFill>
-                  <a:srgbClr val="FFFFFF"/>
-                </a:solidFill>
-                <a:latin typeface="Calibri"/>
-              </a:defRPr>
-            </a:pPr>
-            <a:r>
-              <a:rPr lang="en-IN" dirty="0" err="1"/>
-              <a:t>Omnisec</a:t>
-            </a:r>
-            <a:r>
-              <a:rPr lang="en-IN" dirty="0"/>
-              <a:t> Analyzer</a:t>
-            </a:r>
-            <a:endParaRPr dirty="0"/>
+            <a:r>
+              <a:t>OmniSec Analyzer</a:t>
+            </a:r>
           </a:p>
         </p:txBody>
       </p:sp>
@@ -3211,16 +3197,8 @@
           </a:bodyPr>
           <a:lstStyle/>
           <a:p>
-            <a:pPr algn="ctr">
-              <a:defRPr sz="2600" b="0">
-                <a:solidFill>
-                  <a:srgbClr val="22D3EE"/>
-                </a:solidFill>
-                <a:latin typeface="Calibri"/>
-              </a:defRPr>
-            </a:pPr>
-            <a:r>
-              <a:t>Detect.  Analyze.  Protect.</a:t>
+            <a:r>
+              <a:t>Detect. Analyze. Protect.</a:t>
             </a:r>
           </a:p>
         </p:txBody>
@@ -3247,16 +3225,8 @@
           </a:bodyPr>
           <a:lstStyle/>
           <a:p>
-            <a:pPr algn="ctr">
-              <a:defRPr sz="1800" b="0">
-                <a:solidFill>
-                  <a:srgbClr val="9CA3AF"/>
-                </a:solidFill>
-                <a:latin typeface="Calibri"/>
-              </a:defRPr>
-            </a:pPr>
-            <a:r>
-              <a:t>A Beginner-Friendly Cybersecurity Testing &amp; Learning Platform</a:t>
+            <a:r>
+              <a:t>A cybersecurity learning lab for students and defenders</a:t>
             </a:r>
           </a:p>
         </p:txBody>
@@ -3329,16 +3299,8 @@
           </a:bodyPr>
           <a:lstStyle/>
           <a:p>
-            <a:pPr algn="ctr">
-              <a:defRPr sz="1300" b="0">
-                <a:solidFill>
-                  <a:srgbClr val="9CA3AF"/>
-                </a:solidFill>
-                <a:latin typeface="Calibri"/>
-              </a:defRPr>
-            </a:pPr>
-            <a:r>
-              <a:t>React  ·  TypeScript  ·  Node.js  ·  Express  ·  SQLite</a:t>
+            <a:r>
+              <a:t>React  ?  TypeScript  ?  Node.js  ?  Express  ?  SQLite</a:t>
             </a:r>
           </a:p>
         </p:txBody>
@@ -3365,16 +3327,8 @@
           </a:bodyPr>
           <a:lstStyle/>
           <a:p>
-            <a:pPr algn="ctr">
-              <a:defRPr sz="1200" b="0">
-                <a:solidFill>
-                  <a:srgbClr val="6B7280"/>
-                </a:solidFill>
-                <a:latin typeface="Calibri"/>
-              </a:defRPr>
-            </a:pPr>
-            <a:r>
-              <a:t>College Hackathon Project  |  Educational Use Only  |  No External Scanning</a:t>
+            <a:r>
+              <a:t>Current release | Added: Identity Attack Paths and OSINT Explorer | Removed: API rate-limit tester and BOLA tester</a:t>
             </a:r>
           </a:p>
         </p:txBody>
@@ -3478,29 +3432,8 @@
           </a:bodyPr>
           <a:lstStyle/>
           <a:p>
-            <a:pPr>
-              <a:defRPr sz="3200" b="1">
-                <a:solidFill>
-                  <a:srgbClr val="FFFFFF"/>
-                </a:solidFill>
-                <a:latin typeface="Calibri"/>
-              </a:defRPr>
-            </a:pPr>
-            <a:r>
-              <a:rPr dirty="0"/>
-              <a:t>What Is </a:t>
-            </a:r>
-            <a:r>
-              <a:rPr lang="en-IN" dirty="0" err="1"/>
-              <a:t>Omnisec</a:t>
-            </a:r>
-            <a:r>
-              <a:rPr lang="en-IN" dirty="0"/>
-              <a:t> Analyzer</a:t>
-            </a:r>
-            <a:r>
-              <a:rPr dirty="0"/>
-              <a:t>?</a:t>
+            <a:r>
+              <a:t>What changed in this release?</a:t>
             </a:r>
           </a:p>
         </p:txBody>
@@ -3527,17 +3460,8 @@
           </a:bodyPr>
           <a:lstStyle/>
           <a:p>
-            <a:pPr algn="l">
-              <a:defRPr sz="1600" b="0">
-                <a:solidFill>
-                  <a:srgbClr val="22D3EE"/>
-                </a:solidFill>
-                <a:latin typeface="Calibri"/>
-              </a:defRPr>
-            </a:pPr>
-            <a:r>
-              <a:rPr dirty="0"/>
-              <a:t>A website that teaches you how hackers attack — and how to defend.</a:t>
+            <a:r>
+              <a:t>This version adds two new learning features and removes two older demo tools.</a:t>
             </a:r>
           </a:p>
         </p:txBody>
@@ -3564,72 +3488,75 @@
           </a:bodyPr>
           <a:lstStyle/>
           <a:p>
-            <a:pPr>
-              <a:spcAft>
-                <a:spcPts val="800"/>
-              </a:spcAft>
-              <a:defRPr sz="1600" b="0">
-                <a:solidFill>
-                  <a:srgbClr val="D1D5DB"/>
-                </a:solidFill>
-                <a:latin typeface="Calibri"/>
-              </a:defRPr>
-            </a:pPr>
             <a:r>
               <a:rPr dirty="0"/>
-              <a:t>✦  It has 4 security testing modules — each one teaches a different concept.</a:t>
-            </a:r>
-          </a:p>
-          <a:p>
-            <a:pPr>
-              <a:spcAft>
-                <a:spcPts val="800"/>
-              </a:spcAft>
-              <a:defRPr sz="1600" b="0">
-                <a:solidFill>
-                  <a:srgbClr val="D1D5DB"/>
-                </a:solidFill>
-                <a:latin typeface="Calibri"/>
-              </a:defRPr>
-            </a:pPr>
+              <a:t>Added</a:t>
+            </a:r>
+          </a:p>
+          <a:p>
             <a:r>
               <a:rPr dirty="0"/>
-              <a:t>✦  All tests run on YOUR OWN computer only (localhost) — nothing goes to the internet.</a:t>
-            </a:r>
-          </a:p>
-          <a:p>
-            <a:pPr>
-              <a:spcAft>
-                <a:spcPts val="800"/>
-              </a:spcAft>
-              <a:defRPr sz="1600" b="0">
-                <a:solidFill>
-                  <a:srgbClr val="D1D5DB"/>
-                </a:solidFill>
-                <a:latin typeface="Calibri"/>
-              </a:defRPr>
-            </a:pPr>
+              <a:t>- Identity Attack Paths: fictional graph traversal and simulated remediation</a:t>
+            </a:r>
+          </a:p>
+          <a:p>
             <a:r>
               <a:rPr dirty="0"/>
-              <a:t>✦  It stores results in a local database (SQLite) </a:t>
-            </a:r>
-            <a:endParaRPr lang="en-IN" dirty="0"/>
-          </a:p>
-          <a:p>
-            <a:pPr>
-              <a:spcAft>
-                <a:spcPts val="800"/>
-              </a:spcAft>
-              <a:defRPr sz="1600" b="0">
-                <a:solidFill>
-                  <a:srgbClr val="D1D5DB"/>
-                </a:solidFill>
-                <a:latin typeface="Calibri"/>
-              </a:defRPr>
-            </a:pPr>
+              <a:t>- OSINT Explorer: curated directory and learning path</a:t>
+            </a:r>
+          </a:p>
+          <a:p>
+            <a:endParaRPr dirty="0"/>
+          </a:p>
+          <a:p>
             <a:r>
               <a:rPr dirty="0"/>
-              <a:t>✦  Built for students who are beginners in programming and cybersecurity.</a:t>
+              <a:t>Removed</a:t>
+            </a:r>
+          </a:p>
+          <a:p>
+            <a:r>
+              <a:rPr dirty="0"/>
+              <a:t>- API Rate Limit Tester</a:t>
+            </a:r>
+          </a:p>
+          <a:p>
+            <a:r>
+              <a:rPr dirty="0"/>
+              <a:t>- Standalone API BOLA tester</a:t>
+            </a:r>
+          </a:p>
+          <a:p>
+            <a:endParaRPr dirty="0"/>
+          </a:p>
+          <a:p>
+            <a:r>
+              <a:rPr dirty="0"/>
+              <a:t>Kept</a:t>
+            </a:r>
+          </a:p>
+          <a:p>
+            <a:r>
+              <a:rPr dirty="0"/>
+              <a:t>- Geolocation Intel</a:t>
+            </a:r>
+          </a:p>
+          <a:p>
+            <a:r>
+              <a:rPr dirty="0"/>
+              <a:t>- SQL Injection Tester</a:t>
+            </a:r>
+          </a:p>
+          <a:p>
+            <a:r>
+              <a:rPr dirty="0"/>
+              <a:t>- OWASP Top 10</a:t>
+            </a:r>
+          </a:p>
+          <a:p>
+            <a:r>
+              <a:rPr dirty="0"/>
+              <a:t>- Local lab safety controls</a:t>
             </a:r>
           </a:p>
         </p:txBody>
@@ -3689,7 +3616,7 @@
         <p:spPr>
           <a:xfrm>
             <a:off x="914400" y="5532120"/>
-            <a:ext cx="10058400" cy="457200"/>
+            <a:ext cx="10058400" cy="369332"/>
           </a:xfrm>
           <a:prstGeom prst="rect">
             <a:avLst/>
@@ -3702,16 +3629,13 @@
           </a:bodyPr>
           <a:lstStyle/>
           <a:p>
-            <a:pPr algn="l">
-              <a:defRPr sz="1300" b="1">
+            <a:r>
+              <a:rPr dirty="0">
                 <a:solidFill>
-                  <a:srgbClr val="10B981"/>
+                  <a:schemeClr val="bg1"/>
                 </a:solidFill>
-                <a:latin typeface="Calibri"/>
-              </a:defRPr>
-            </a:pPr>
-            <a:r>
-              <a:t>KEY WORD:  "Educational Lab" = A safe sandbox on your own machine for learning, not attacking.</a:t>
+              </a:rPr>
+              <a:t>KEY MESSAGE: educational lab features stay local, simulated, and safe.</a:t>
             </a:r>
           </a:p>
         </p:txBody>
@@ -3815,16 +3739,8 @@
           </a:bodyPr>
           <a:lstStyle/>
           <a:p>
-            <a:pPr algn="l">
-              <a:defRPr sz="3000" b="1">
-                <a:solidFill>
-                  <a:srgbClr val="FFFFFF"/>
-                </a:solidFill>
-                <a:latin typeface="Calibri"/>
-              </a:defRPr>
-            </a:pPr>
-            <a:r>
-              <a:t>4 Security Modules — What Each One Does</a:t>
+            <a:r>
+              <a:t>Current product modules</a:t>
             </a:r>
           </a:p>
         </p:txBody>
@@ -3941,16 +3857,8 @@
           </a:bodyPr>
           <a:lstStyle/>
           <a:p>
-            <a:pPr algn="l">
-              <a:defRPr sz="1500" b="1">
-                <a:solidFill>
-                  <a:srgbClr val="22D3EE"/>
-                </a:solidFill>
-                <a:latin typeface="Calibri"/>
-              </a:defRPr>
-            </a:pPr>
-            <a:r>
-              <a:t>Module 1 — Geolocation Intelligence</a:t>
+            <a:r>
+              <a:t>Module 1 - Geolocation Intel</a:t>
             </a:r>
           </a:p>
         </p:txBody>
@@ -3977,67 +3885,18 @@
           </a:bodyPr>
           <a:lstStyle/>
           <a:p>
-            <a:pPr>
-              <a:spcAft>
-                <a:spcPts val="650"/>
-              </a:spcAft>
-              <a:defRPr sz="1300" b="0">
-                <a:solidFill>
-                  <a:srgbClr val="D1D5DB"/>
-                </a:solidFill>
-                <a:latin typeface="Calibri"/>
-              </a:defRPr>
-            </a:pPr>
-            <a:r>
-              <a:t>•  You type an IP address (like 8.8.8.8 = Google's server)</a:t>
-            </a:r>
-          </a:p>
-          <a:p>
-            <a:pPr>
-              <a:spcAft>
-                <a:spcPts val="650"/>
-              </a:spcAft>
-              <a:defRPr sz="1300" b="0">
-                <a:solidFill>
-                  <a:srgbClr val="D1D5DB"/>
-                </a:solidFill>
-                <a:latin typeface="Calibri"/>
-              </a:defRPr>
-            </a:pPr>
-            <a:r>
-              <a:t>•  It shows: Country, City, ISP name, Coordinates</a:t>
-            </a:r>
-          </a:p>
-          <a:p>
-            <a:pPr>
-              <a:spcAft>
-                <a:spcPts val="650"/>
-              </a:spcAft>
-              <a:defRPr sz="1300" b="0">
-                <a:solidFill>
-                  <a:srgbClr val="D1D5DB"/>
-                </a:solidFill>
-                <a:latin typeface="Calibri"/>
-              </a:defRPr>
-            </a:pPr>
-            <a:r>
-              <a:t>•  Uses a free API (ip-api.com) to look up info</a:t>
-            </a:r>
-          </a:p>
-          <a:p>
-            <a:pPr>
-              <a:spcAft>
-                <a:spcPts val="650"/>
-              </a:spcAft>
-              <a:defRPr sz="1300" b="0">
-                <a:solidFill>
-                  <a:srgbClr val="D1D5DB"/>
-                </a:solidFill>
-                <a:latin typeface="Calibri"/>
-              </a:defRPr>
-            </a:pPr>
-            <a:r>
-              <a:t>•  Teaches: How every device on the internet has an address</a:t>
+            <a:r>
+              <a:t>? Public IP lookup with approximate city/region and map view</a:t>
+            </a:r>
+          </a:p>
+          <a:p>
+            <a:r>
+              <a:t>? Teaches how network metadata can be interpreted in context</a:t>
+            </a:r>
+          </a:p>
+          <a:p>
+            <a:r>
+              <a:t>? Uses the configured external geolocation provider only when needed</a:t>
             </a:r>
           </a:p>
         </p:txBody>
@@ -4154,16 +4013,8 @@
           </a:bodyPr>
           <a:lstStyle/>
           <a:p>
-            <a:pPr algn="l">
-              <a:defRPr sz="1500" b="1">
-                <a:solidFill>
-                  <a:srgbClr val="A78BFA"/>
-                </a:solidFill>
-                <a:latin typeface="Calibri"/>
-              </a:defRPr>
-            </a:pPr>
-            <a:r>
-              <a:t>Module 2 — SQL Injection Tester</a:t>
+            <a:r>
+              <a:t>Module 2 - SQL Injection Tester</a:t>
             </a:r>
           </a:p>
         </p:txBody>
@@ -4190,67 +4041,18 @@
           </a:bodyPr>
           <a:lstStyle/>
           <a:p>
-            <a:pPr>
-              <a:spcAft>
-                <a:spcPts val="650"/>
-              </a:spcAft>
-              <a:defRPr sz="1300" b="0">
-                <a:solidFill>
-                  <a:srgbClr val="D1D5DB"/>
-                </a:solidFill>
-                <a:latin typeface="Calibri"/>
-              </a:defRPr>
-            </a:pPr>
-            <a:r>
-              <a:t>•  SQL = the language used to talk to databases</a:t>
-            </a:r>
-          </a:p>
-          <a:p>
-            <a:pPr>
-              <a:spcAft>
-                <a:spcPts val="650"/>
-              </a:spcAft>
-              <a:defRPr sz="1300" b="0">
-                <a:solidFill>
-                  <a:srgbClr val="D1D5DB"/>
-                </a:solidFill>
-                <a:latin typeface="Calibri"/>
-              </a:defRPr>
-            </a:pPr>
-            <a:r>
-              <a:t>•  Injection = putting harmful commands into input fields</a:t>
-            </a:r>
-          </a:p>
-          <a:p>
-            <a:pPr>
-              <a:spcAft>
-                <a:spcPts val="650"/>
-              </a:spcAft>
-              <a:defRPr sz="1300" b="0">
-                <a:solidFill>
-                  <a:srgbClr val="D1D5DB"/>
-                </a:solidFill>
-                <a:latin typeface="Calibri"/>
-              </a:defRPr>
-            </a:pPr>
-            <a:r>
-              <a:t>•  Shows VULNERABLE code vs SECURE code side-by-side</a:t>
-            </a:r>
-          </a:p>
-          <a:p>
-            <a:pPr>
-              <a:spcAft>
-                <a:spcPts val="650"/>
-              </a:spcAft>
-              <a:defRPr sz="1300" b="0">
-                <a:solidFill>
-                  <a:srgbClr val="D1D5DB"/>
-                </a:solidFill>
-                <a:latin typeface="Calibri"/>
-              </a:defRPr>
-            </a:pPr>
-            <a:r>
-              <a:t>•  Teaches: Always use '?' placeholders, never paste user input into queries</a:t>
+            <a:r>
+              <a:t>? Shows vulnerable and secure query patterns side-by-side</a:t>
+            </a:r>
+          </a:p>
+          <a:p>
+            <a:r>
+              <a:t>? Demonstrates the difference between unsafe SQL construction and parameterized queries</a:t>
+            </a:r>
+          </a:p>
+          <a:p>
+            <a:r>
+              <a:t>? Safe educational lab only</a:t>
             </a:r>
           </a:p>
         </p:txBody>
@@ -4367,16 +4169,8 @@
           </a:bodyPr>
           <a:lstStyle/>
           <a:p>
-            <a:pPr algn="l">
-              <a:defRPr sz="1500" b="1">
-                <a:solidFill>
-                  <a:srgbClr val="F59E0B"/>
-                </a:solidFill>
-                <a:latin typeface="Calibri"/>
-              </a:defRPr>
-            </a:pPr>
-            <a:r>
-              <a:t>Module 3 — OWASP Top 10 Scanner</a:t>
+            <a:r>
+              <a:t>Module 3 - OWASP Top 10</a:t>
             </a:r>
           </a:p>
         </p:txBody>
@@ -4403,67 +4197,18 @@
           </a:bodyPr>
           <a:lstStyle/>
           <a:p>
-            <a:pPr>
-              <a:spcAft>
-                <a:spcPts val="650"/>
-              </a:spcAft>
-              <a:defRPr sz="1300" b="0">
-                <a:solidFill>
-                  <a:srgbClr val="D1D5DB"/>
-                </a:solidFill>
-                <a:latin typeface="Calibri"/>
-              </a:defRPr>
-            </a:pPr>
-            <a:r>
-              <a:t>•  OWASP = a world-famous list of 10 biggest web security risks</a:t>
-            </a:r>
-          </a:p>
-          <a:p>
-            <a:pPr>
-              <a:spcAft>
-                <a:spcPts val="650"/>
-              </a:spcAft>
-              <a:defRPr sz="1300" b="0">
-                <a:solidFill>
-                  <a:srgbClr val="D1D5DB"/>
-                </a:solidFill>
-                <a:latin typeface="Calibri"/>
-              </a:defRPr>
-            </a:pPr>
-            <a:r>
-              <a:t>•  Checks: security headers, access control, logging, encryption</a:t>
-            </a:r>
-          </a:p>
-          <a:p>
-            <a:pPr>
-              <a:spcAft>
-                <a:spcPts val="650"/>
-              </a:spcAft>
-              <a:defRPr sz="1300" b="0">
-                <a:solidFill>
-                  <a:srgbClr val="D1D5DB"/>
-                </a:solidFill>
-                <a:latin typeface="Calibri"/>
-              </a:defRPr>
-            </a:pPr>
-            <a:r>
-              <a:t>•  Also has URL Safety Checker (paste a link → checks format locally)</a:t>
-            </a:r>
-          </a:p>
-          <a:p>
-            <a:pPr>
-              <a:spcAft>
-                <a:spcPts val="650"/>
-              </a:spcAft>
-              <a:defRPr sz="1300" b="0">
-                <a:solidFill>
-                  <a:srgbClr val="D1D5DB"/>
-                </a:solidFill>
-                <a:latin typeface="Calibri"/>
-              </a:defRPr>
-            </a:pPr>
-            <a:r>
-              <a:t>•  Teaches: The top 10 things every web developer must protect against</a:t>
+            <a:r>
+              <a:t>? Real-time checks against registered local demo targets</a:t>
+            </a:r>
+          </a:p>
+          <a:p>
+            <a:r>
+              <a:t>? Includes evidence, remediation guidance, and report downloads</a:t>
+            </a:r>
+          </a:p>
+          <a:p>
+            <a:r>
+              <a:t>? Enforces the local-lab boundary and cautious target validation</a:t>
             </a:r>
           </a:p>
         </p:txBody>
@@ -4580,16 +4325,8 @@
           </a:bodyPr>
           <a:lstStyle/>
           <a:p>
-            <a:pPr algn="l">
-              <a:defRPr sz="1500" b="1">
-                <a:solidFill>
-                  <a:srgbClr val="10B981"/>
-                </a:solidFill>
-                <a:latin typeface="Calibri"/>
-              </a:defRPr>
-            </a:pPr>
-            <a:r>
-              <a:t>Module 4 — API Rate Limit Tester</a:t>
+            <a:r>
+              <a:t>Module 4 - Identity Attack Paths</a:t>
             </a:r>
           </a:p>
         </p:txBody>
@@ -4616,67 +4353,18 @@
           </a:bodyPr>
           <a:lstStyle/>
           <a:p>
-            <a:pPr>
-              <a:spcAft>
-                <a:spcPts val="650"/>
-              </a:spcAft>
-              <a:defRPr sz="1300" b="0">
-                <a:solidFill>
-                  <a:srgbClr val="D1D5DB"/>
-                </a:solidFill>
-                <a:latin typeface="Calibri"/>
-              </a:defRPr>
-            </a:pPr>
-            <a:r>
-              <a:t>•  API = a door where programs send/receive data</a:t>
-            </a:r>
-          </a:p>
-          <a:p>
-            <a:pPr>
-              <a:spcAft>
-                <a:spcPts val="650"/>
-              </a:spcAft>
-              <a:defRPr sz="1300" b="0">
-                <a:solidFill>
-                  <a:srgbClr val="D1D5DB"/>
-                </a:solidFill>
-                <a:latin typeface="Calibri"/>
-              </a:defRPr>
-            </a:pPr>
-            <a:r>
-              <a:t>•  Rate Limit = a rule saying 'max 100 requests per minute'</a:t>
-            </a:r>
-          </a:p>
-          <a:p>
-            <a:pPr>
-              <a:spcAft>
-                <a:spcPts val="650"/>
-              </a:spcAft>
-              <a:defRPr sz="1300" b="0">
-                <a:solidFill>
-                  <a:srgbClr val="D1D5DB"/>
-                </a:solidFill>
-                <a:latin typeface="Calibri"/>
-              </a:defRPr>
-            </a:pPr>
-            <a:r>
-              <a:t>•  Sends a burst of requests → shows which ones get blocked (HTTP 429)</a:t>
-            </a:r>
-          </a:p>
-          <a:p>
-            <a:pPr>
-              <a:spcAft>
-                <a:spcPts val="650"/>
-              </a:spcAft>
-              <a:defRPr sz="1300" b="0">
-                <a:solidFill>
-                  <a:srgbClr val="D1D5DB"/>
-                </a:solidFill>
-                <a:latin typeface="Calibri"/>
-              </a:defRPr>
-            </a:pPr>
-            <a:r>
-              <a:t>•  Teaches: How websites stop bots and spam attacks</a:t>
+            <a:r>
+              <a:t>? Fictional Acme Corporation graph traversal demo</a:t>
+            </a:r>
+          </a:p>
+          <a:p>
+            <a:r>
+              <a:t>? Simulates path analysis and in-memory remediation changes</a:t>
+            </a:r>
+          </a:p>
+          <a:p>
+            <a:r>
+              <a:t>? Clear labeling: results are demo-only and not real identity evidence</a:t>
             </a:r>
           </a:p>
         </p:txBody>
@@ -4780,16 +4468,8 @@
           </a:bodyPr>
           <a:lstStyle/>
           <a:p>
-            <a:pPr algn="l">
-              <a:defRPr sz="3000" b="1">
-                <a:solidFill>
-                  <a:srgbClr val="FFFFFF"/>
-                </a:solidFill>
-                <a:latin typeface="Calibri"/>
-              </a:defRPr>
-            </a:pPr>
-            <a:r>
-              <a:t>How It Works — Simple Architecture</a:t>
+            <a:r>
+              <a:t>How it works - current architecture</a:t>
             </a:r>
           </a:p>
         </p:txBody>
@@ -4906,16 +4586,8 @@
           </a:bodyPr>
           <a:lstStyle/>
           <a:p>
-            <a:pPr algn="l">
-              <a:defRPr sz="1500" b="1">
-                <a:solidFill>
-                  <a:srgbClr val="22D3EE"/>
-                </a:solidFill>
-                <a:latin typeface="Calibri"/>
-              </a:defRPr>
-            </a:pPr>
-            <a:r>
-              <a:t>FRONTEND  (What You See)</a:t>
+            <a:r>
+              <a:t>FRONTEND (What you see)</a:t>
             </a:r>
           </a:p>
         </p:txBody>
@@ -4942,99 +4614,23 @@
           </a:bodyPr>
           <a:lstStyle/>
           <a:p>
-            <a:pPr>
-              <a:spcAft>
-                <a:spcPts val="600"/>
-              </a:spcAft>
-              <a:defRPr sz="1200" b="0">
-                <a:solidFill>
-                  <a:srgbClr val="D1D5DB"/>
-                </a:solidFill>
-                <a:latin typeface="Calibri"/>
-              </a:defRPr>
-            </a:pPr>
-            <a:r>
-              <a:t>•  Built with React + TypeScript</a:t>
-            </a:r>
-          </a:p>
-          <a:p>
-            <a:pPr>
-              <a:spcAft>
-                <a:spcPts val="600"/>
-              </a:spcAft>
-              <a:defRPr sz="1200" b="0">
-                <a:solidFill>
-                  <a:srgbClr val="D1D5DB"/>
-                </a:solidFill>
-                <a:latin typeface="Calibri"/>
-              </a:defRPr>
-            </a:pPr>
-            <a:r>
-              <a:t>•  Runs in your browser (Chrome)</a:t>
-            </a:r>
-          </a:p>
-          <a:p>
-            <a:pPr>
-              <a:spcAft>
-                <a:spcPts val="600"/>
-              </a:spcAft>
-              <a:defRPr sz="1200" b="0">
-                <a:solidFill>
-                  <a:srgbClr val="D1D5DB"/>
-                </a:solidFill>
-                <a:latin typeface="Calibri"/>
-              </a:defRPr>
-            </a:pPr>
-            <a:r>
-              <a:t>•  Dashboard with sidebar navigation</a:t>
-            </a:r>
-          </a:p>
-          <a:p>
-            <a:pPr>
-              <a:spcAft>
-                <a:spcPts val="600"/>
-              </a:spcAft>
-              <a:defRPr sz="1200" b="0">
-                <a:solidFill>
-                  <a:srgbClr val="D1D5DB"/>
-                </a:solidFill>
-                <a:latin typeface="Calibri"/>
-              </a:defRPr>
-            </a:pPr>
-            <a:r>
-              <a:t>•  Forms to enter IPs, SQL payloads, URLs</a:t>
-            </a:r>
-          </a:p>
-          <a:p>
-            <a:pPr>
-              <a:spcAft>
-                <a:spcPts val="600"/>
-              </a:spcAft>
-              <a:defRPr sz="1200" b="0">
-                <a:solidFill>
-                  <a:srgbClr val="D1D5DB"/>
-                </a:solidFill>
-                <a:latin typeface="Calibri"/>
-              </a:defRPr>
-            </a:pPr>
-            <a:r>
-              <a:t>•  Charts and tables show results visually</a:t>
-            </a:r>
-          </a:p>
-          <a:p>
-            <a:pPr>
-              <a:spcAft>
-                <a:spcPts val="600"/>
-              </a:spcAft>
-              <a:defRPr sz="1200" b="0">
-                <a:solidFill>
-                  <a:srgbClr val="D1D5DB"/>
-                </a:solidFill>
-                <a:latin typeface="Calibri"/>
-              </a:defRPr>
-            </a:pPr>
-            <a:r>
-              <a:t>•  Dark theme with cyan/violet accents</a:t>
+            <a:r>
+              <a:t>? Built with React + TypeScript</a:t>
+            </a:r>
+          </a:p>
+          <a:p>
+            <a:r>
+              <a:t>? Sidebar-driven navigation</a:t>
+            </a:r>
+          </a:p>
+          <a:p>
+            <a:r>
+              <a:t>? Geolocation, SQL lab, OWASP checks, graph explorer, OSINT catalogue</a:t>
+            </a:r>
+          </a:p>
+          <a:p>
+            <a:r>
+              <a:t>? Charts, tables, report views, and local settings</a:t>
             </a:r>
           </a:p>
         </p:txBody>
@@ -5061,16 +4657,8 @@
           </a:bodyPr>
           <a:lstStyle/>
           <a:p>
-            <a:pPr algn="ctr">
-              <a:defRPr sz="4000" b="1">
-                <a:solidFill>
-                  <a:srgbClr val="22D3EE"/>
-                </a:solidFill>
-                <a:latin typeface="Calibri"/>
-              </a:defRPr>
-            </a:pPr>
-            <a:r>
-              <a:t>→</a:t>
+            <a:r>
+              <a:t>-&gt;</a:t>
             </a:r>
           </a:p>
         </p:txBody>
@@ -5187,16 +4775,8 @@
           </a:bodyPr>
           <a:lstStyle/>
           <a:p>
-            <a:pPr algn="l">
-              <a:defRPr sz="1500" b="1">
-                <a:solidFill>
-                  <a:srgbClr val="A78BFA"/>
-                </a:solidFill>
-                <a:latin typeface="Calibri"/>
-              </a:defRPr>
-            </a:pPr>
-            <a:r>
-              <a:t>BACKEND  (The Brain)</a:t>
+            <a:r>
+              <a:t>BACKEND (The brain)</a:t>
             </a:r>
           </a:p>
         </p:txBody>
@@ -5223,99 +4803,23 @@
           </a:bodyPr>
           <a:lstStyle/>
           <a:p>
-            <a:pPr>
-              <a:spcAft>
-                <a:spcPts val="600"/>
-              </a:spcAft>
-              <a:defRPr sz="1200" b="0">
-                <a:solidFill>
-                  <a:srgbClr val="D1D5DB"/>
-                </a:solidFill>
-                <a:latin typeface="Calibri"/>
-              </a:defRPr>
-            </a:pPr>
-            <a:r>
-              <a:t>•  Built with Node.js + Express</a:t>
-            </a:r>
-          </a:p>
-          <a:p>
-            <a:pPr>
-              <a:spcAft>
-                <a:spcPts val="600"/>
-              </a:spcAft>
-              <a:defRPr sz="1200" b="0">
-                <a:solidFill>
-                  <a:srgbClr val="D1D5DB"/>
-                </a:solidFill>
-                <a:latin typeface="Calibri"/>
-              </a:defRPr>
-            </a:pPr>
-            <a:r>
-              <a:t>•  Receives requests from frontend</a:t>
-            </a:r>
-          </a:p>
-          <a:p>
-            <a:pPr>
-              <a:spcAft>
-                <a:spcPts val="600"/>
-              </a:spcAft>
-              <a:defRPr sz="1200" b="0">
-                <a:solidFill>
-                  <a:srgbClr val="D1D5DB"/>
-                </a:solidFill>
-                <a:latin typeface="Calibri"/>
-              </a:defRPr>
-            </a:pPr>
-            <a:r>
-              <a:t>•  Runs security checks and tests</a:t>
-            </a:r>
-          </a:p>
-          <a:p>
-            <a:pPr>
-              <a:spcAft>
-                <a:spcPts val="600"/>
-              </a:spcAft>
-              <a:defRPr sz="1200" b="0">
-                <a:solidFill>
-                  <a:srgbClr val="D1D5DB"/>
-                </a:solidFill>
-                <a:latin typeface="Calibri"/>
-              </a:defRPr>
-            </a:pPr>
-            <a:r>
-              <a:t>•  Local lab server with demo apps</a:t>
-            </a:r>
-          </a:p>
-          <a:p>
-            <a:pPr>
-              <a:spcAft>
-                <a:spcPts val="600"/>
-              </a:spcAft>
-              <a:defRPr sz="1200" b="0">
-                <a:solidFill>
-                  <a:srgbClr val="D1D5DB"/>
-                </a:solidFill>
-                <a:latin typeface="Calibri"/>
-              </a:defRPr>
-            </a:pPr>
-            <a:r>
-              <a:t>•  Protected APIs with rate limiting</a:t>
-            </a:r>
-          </a:p>
-          <a:p>
-            <a:pPr>
-              <a:spcAft>
-                <a:spcPts val="600"/>
-              </a:spcAft>
-              <a:defRPr sz="1200" b="0">
-                <a:solidFill>
-                  <a:srgbClr val="D1D5DB"/>
-                </a:solidFill>
-                <a:latin typeface="Calibri"/>
-              </a:defRPr>
-            </a:pPr>
-            <a:r>
-              <a:t>•  Sends results back as JSON data</a:t>
+            <a:r>
+              <a:t>? Built with Node.js + Express</a:t>
+            </a:r>
+          </a:p>
+          <a:p>
+            <a:r>
+              <a:t>? Receives UI requests and local lab actions</a:t>
+            </a:r>
+          </a:p>
+          <a:p>
+            <a:r>
+              <a:t>? Runs assessment checks and report generation</a:t>
+            </a:r>
+          </a:p>
+          <a:p>
+            <a:r>
+              <a:t>? Validates targets and keeps defensive middleware active</a:t>
             </a:r>
           </a:p>
         </p:txBody>
@@ -5342,16 +4846,8 @@
           </a:bodyPr>
           <a:lstStyle/>
           <a:p>
-            <a:pPr algn="ctr">
-              <a:defRPr sz="4000" b="1">
-                <a:solidFill>
-                  <a:srgbClr val="A78BFA"/>
-                </a:solidFill>
-                <a:latin typeface="Calibri"/>
-              </a:defRPr>
-            </a:pPr>
-            <a:r>
-              <a:t>→</a:t>
+            <a:r>
+              <a:t>-&gt;</a:t>
             </a:r>
           </a:p>
         </p:txBody>
@@ -5468,16 +4964,8 @@
           </a:bodyPr>
           <a:lstStyle/>
           <a:p>
-            <a:pPr algn="l">
-              <a:defRPr sz="1500" b="1">
-                <a:solidFill>
-                  <a:srgbClr val="10B981"/>
-                </a:solidFill>
-                <a:latin typeface="Calibri"/>
-              </a:defRPr>
-            </a:pPr>
-            <a:r>
-              <a:t>DATABASE  (Memory)</a:t>
+            <a:r>
+              <a:t>DATABASE (Persistence)</a:t>
             </a:r>
           </a:p>
         </p:txBody>
@@ -5504,99 +4992,23 @@
           </a:bodyPr>
           <a:lstStyle/>
           <a:p>
-            <a:pPr>
-              <a:spcAft>
-                <a:spcPts val="600"/>
-              </a:spcAft>
-              <a:defRPr sz="1200" b="0">
-                <a:solidFill>
-                  <a:srgbClr val="D1D5DB"/>
-                </a:solidFill>
-                <a:latin typeface="Calibri"/>
-              </a:defRPr>
-            </a:pPr>
-            <a:r>
-              <a:t>•  SQLite — a small file-based database</a:t>
-            </a:r>
-          </a:p>
-          <a:p>
-            <a:pPr>
-              <a:spcAft>
-                <a:spcPts val="600"/>
-              </a:spcAft>
-              <a:defRPr sz="1200" b="0">
-                <a:solidFill>
-                  <a:srgbClr val="D1D5DB"/>
-                </a:solidFill>
-                <a:latin typeface="Calibri"/>
-              </a:defRPr>
-            </a:pPr>
-            <a:r>
-              <a:t>•  Stores: scan history, findings, settings</a:t>
-            </a:r>
-          </a:p>
-          <a:p>
-            <a:pPr>
-              <a:spcAft>
-                <a:spcPts val="600"/>
-              </a:spcAft>
-              <a:defRPr sz="1200" b="0">
-                <a:solidFill>
-                  <a:srgbClr val="D1D5DB"/>
-                </a:solidFill>
-                <a:latin typeface="Calibri"/>
-              </a:defRPr>
-            </a:pPr>
-            <a:r>
-              <a:t>•  No complex setup needed (no MySQL/Postgres)</a:t>
-            </a:r>
-          </a:p>
-          <a:p>
-            <a:pPr>
-              <a:spcAft>
-                <a:spcPts val="600"/>
-              </a:spcAft>
-              <a:defRPr sz="1200" b="0">
-                <a:solidFill>
-                  <a:srgbClr val="D1D5DB"/>
-                </a:solidFill>
-                <a:latin typeface="Calibri"/>
-              </a:defRPr>
-            </a:pPr>
-            <a:r>
-              <a:t>•  Can export reports as HTML or JSON</a:t>
-            </a:r>
-          </a:p>
-          <a:p>
-            <a:pPr>
-              <a:spcAft>
-                <a:spcPts val="600"/>
-              </a:spcAft>
-              <a:defRPr sz="1200" b="0">
-                <a:solidFill>
-                  <a:srgbClr val="D1D5DB"/>
-                </a:solidFill>
-                <a:latin typeface="Calibri"/>
-              </a:defRPr>
-            </a:pPr>
-            <a:r>
-              <a:t>•  Persists data between sessions</a:t>
-            </a:r>
-          </a:p>
-          <a:p>
-            <a:pPr>
-              <a:spcAft>
-                <a:spcPts val="600"/>
-              </a:spcAft>
-              <a:defRPr sz="1200" b="0">
-                <a:solidFill>
-                  <a:srgbClr val="D1D5DB"/>
-                </a:solidFill>
-                <a:latin typeface="Calibri"/>
-              </a:defRPr>
-            </a:pPr>
-            <a:r>
-              <a:t>•  All data stays on your laptop</a:t>
+            <a:r>
+              <a:t>? SQLite file-based persistence</a:t>
+            </a:r>
+          </a:p>
+          <a:p>
+            <a:r>
+              <a:t>? Stores scan history, findings, reports, and settings</a:t>
+            </a:r>
+          </a:p>
+          <a:p>
+            <a:r>
+              <a:t>? Keeps the educational lab local to the machine</a:t>
+            </a:r>
+          </a:p>
+          <a:p>
+            <a:r>
+              <a:t>? Identity and OSINT data remain client-side demo data</a:t>
             </a:r>
           </a:p>
         </p:txBody>
@@ -5669,35 +5081,8 @@
           </a:bodyPr>
           <a:lstStyle/>
           <a:p>
-            <a:pPr>
-              <a:spcAft>
-                <a:spcPts val="600"/>
-              </a:spcAft>
-              <a:defRPr sz="1200" b="1">
-                <a:solidFill>
-                  <a:srgbClr val="10B981"/>
-                </a:solidFill>
-                <a:latin typeface="Calibri"/>
-              </a:defRPr>
-            </a:pPr>
-            <a:r>
-              <a:t>KEY WORDS TO REMEMBER:</a:t>
-            </a:r>
-          </a:p>
-          <a:p>
-            <a:pPr>
-              <a:spcAft>
-                <a:spcPts val="600"/>
-              </a:spcAft>
-              <a:defRPr sz="1200" b="1">
-                <a:solidFill>
-                  <a:srgbClr val="10B981"/>
-                </a:solidFill>
-                <a:latin typeface="Calibri"/>
-              </a:defRPr>
-            </a:pPr>
-            <a:r>
-              <a:t>Frontend = the screen you see  |  Backend = the server doing work  |  Database = where results are saved  |  API = how frontend talks to backend  |  localhost = your own computer</a:t>
+            <a:r>
+              <a:t>KEY IDEAS: Frontend = UI, Backend = logic, Database = saved results, localhost = local-only educational lab</a:t>
             </a:r>
           </a:p>
         </p:txBody>
@@ -5801,16 +5186,8 @@
           </a:bodyPr>
           <a:lstStyle/>
           <a:p>
-            <a:pPr algn="l">
-              <a:defRPr sz="3000" b="1">
-                <a:solidFill>
-                  <a:srgbClr val="FFFFFF"/>
-                </a:solidFill>
-                <a:latin typeface="Calibri"/>
-              </a:defRPr>
-            </a:pPr>
-            <a:r>
-              <a:t>Safety, Ethics &amp; Restrictions</a:t>
+            <a:r>
+              <a:t>Safety, ethics, and boundaries</a:t>
             </a:r>
           </a:p>
         </p:txBody>
@@ -5837,16 +5214,8 @@
           </a:bodyPr>
           <a:lstStyle/>
           <a:p>
-            <a:pPr algn="l">
-              <a:defRPr sz="1600" b="0">
-                <a:solidFill>
-                  <a:srgbClr val="9CA3AF"/>
-                </a:solidFill>
-                <a:latin typeface="Calibri"/>
-              </a:defRPr>
-            </a:pPr>
-            <a:r>
-              <a:t>This project is built with strict safety rules. Here's what we enforce:</a:t>
+            <a:r>
+              <a:t>This project is designed for safe learning and authorized defensive use.</a:t>
             </a:r>
           </a:p>
         </p:txBody>
@@ -5919,14 +5288,6 @@
           </a:bodyPr>
           <a:lstStyle/>
           <a:p>
-            <a:pPr algn="ctr">
-              <a:defRPr sz="1400" b="1">
-                <a:solidFill>
-                  <a:srgbClr val="EF4444"/>
-                </a:solidFill>
-                <a:latin typeface="Calibri"/>
-              </a:defRPr>
-            </a:pPr>
             <a:r>
               <a:t>1</a:t>
             </a:r>
@@ -5955,16 +5316,8 @@
           </a:bodyPr>
           <a:lstStyle/>
           <a:p>
-            <a:pPr algn="l">
-              <a:defRPr sz="1500" b="1">
-                <a:solidFill>
-                  <a:srgbClr val="FFFFFF"/>
-                </a:solidFill>
-                <a:latin typeface="Calibri"/>
-              </a:defRPr>
-            </a:pPr>
-            <a:r>
-              <a:t>NO external scanning</a:t>
+            <a:r>
+              <a:t>Local-only target validation</a:t>
             </a:r>
           </a:p>
         </p:txBody>
@@ -5991,16 +5344,8 @@
           </a:bodyPr>
           <a:lstStyle/>
           <a:p>
-            <a:pPr algn="l">
-              <a:defRPr sz="1200" b="0">
-                <a:solidFill>
-                  <a:srgbClr val="9CA3AF"/>
-                </a:solidFill>
-                <a:latin typeface="Calibri"/>
-              </a:defRPr>
-            </a:pPr>
-            <a:r>
-              <a:t>The app never sends attacks to real websites or public servers. Everything runs on localhost (127.0.0.1).</a:t>
+            <a:r>
+              <a:t>The app checks every OWASP target against registered local demo services. External targets are not considered valid test subjects.</a:t>
             </a:r>
           </a:p>
         </p:txBody>
@@ -6073,14 +5418,6 @@
           </a:bodyPr>
           <a:lstStyle/>
           <a:p>
-            <a:pPr algn="ctr">
-              <a:defRPr sz="1400" b="1">
-                <a:solidFill>
-                  <a:srgbClr val="EF4444"/>
-                </a:solidFill>
-                <a:latin typeface="Calibri"/>
-              </a:defRPr>
-            </a:pPr>
             <a:r>
               <a:t>2</a:t>
             </a:r>
@@ -6109,16 +5446,8 @@
           </a:bodyPr>
           <a:lstStyle/>
           <a:p>
-            <a:pPr algn="l">
-              <a:defRPr sz="1500" b="1">
-                <a:solidFill>
-                  <a:srgbClr val="FFFFFF"/>
-                </a:solidFill>
-                <a:latin typeface="Calibri"/>
-              </a:defRPr>
-            </a:pPr>
-            <a:r>
-              <a:t>Isolated educational lab</a:t>
+            <a:r>
+              <a:t>Passive URL inspection</a:t>
             </a:r>
           </a:p>
         </p:txBody>
@@ -6145,16 +5474,8 @@
           </a:bodyPr>
           <a:lstStyle/>
           <a:p>
-            <a:pPr algn="l">
-              <a:defRPr sz="1200" b="0">
-                <a:solidFill>
-                  <a:srgbClr val="9CA3AF"/>
-                </a:solidFill>
-                <a:latin typeface="Calibri"/>
-              </a:defRPr>
-            </a:pPr>
-            <a:r>
-              <a:t>We built a fake vulnerable app and a fake secure app inside our own server — only these are tested.</a:t>
+            <a:r>
+              <a:t>The URL safety check inspects URL structure locally; it does not visit the destination.</a:t>
             </a:r>
           </a:p>
         </p:txBody>
@@ -6227,14 +5548,6 @@
           </a:bodyPr>
           <a:lstStyle/>
           <a:p>
-            <a:pPr algn="ctr">
-              <a:defRPr sz="1400" b="1">
-                <a:solidFill>
-                  <a:srgbClr val="EF4444"/>
-                </a:solidFill>
-                <a:latin typeface="Calibri"/>
-              </a:defRPr>
-            </a:pPr>
             <a:r>
               <a:t>3</a:t>
             </a:r>
@@ -6263,16 +5576,8 @@
           </a:bodyPr>
           <a:lstStyle/>
           <a:p>
-            <a:pPr algn="l">
-              <a:defRPr sz="1500" b="1">
-                <a:solidFill>
-                  <a:srgbClr val="FFFFFF"/>
-                </a:solidFill>
-                <a:latin typeface="Calibri"/>
-              </a:defRPr>
-            </a:pPr>
-            <a:r>
-              <a:t>Target registry validation</a:t>
+            <a:r>
+              <a:t>Identity graph is fictional</a:t>
             </a:r>
           </a:p>
         </p:txBody>
@@ -6299,16 +5604,8 @@
           </a:bodyPr>
           <a:lstStyle/>
           <a:p>
-            <a:pPr algn="l">
-              <a:defRPr sz="1200" b="0">
-                <a:solidFill>
-                  <a:srgbClr val="9CA3AF"/>
-                </a:solidFill>
-                <a:latin typeface="Calibri"/>
-              </a:defRPr>
-            </a:pPr>
-            <a:r>
-              <a:t>The backend checks every request to ensure the target is a registered local lab address. External URLs are rejected.</a:t>
+            <a:r>
+              <a:t>Identity Attack Paths is demo-only and labeled as simulated; it does not reflect a real organization or live directory.</a:t>
             </a:r>
           </a:p>
         </p:txBody>
@@ -6381,14 +5678,6 @@
           </a:bodyPr>
           <a:lstStyle/>
           <a:p>
-            <a:pPr algn="ctr">
-              <a:defRPr sz="1400" b="1">
-                <a:solidFill>
-                  <a:srgbClr val="EF4444"/>
-                </a:solidFill>
-                <a:latin typeface="Calibri"/>
-              </a:defRPr>
-            </a:pPr>
             <a:r>
               <a:t>4</a:t>
             </a:r>
@@ -6417,16 +5706,8 @@
           </a:bodyPr>
           <a:lstStyle/>
           <a:p>
-            <a:pPr algn="l">
-              <a:defRPr sz="1500" b="1">
-                <a:solidFill>
-                  <a:srgbClr val="FFFFFF"/>
-                </a:solidFill>
-                <a:latin typeface="Calibri"/>
-              </a:defRPr>
-            </a:pPr>
-            <a:r>
-              <a:t>All findings are real</a:t>
+            <a:r>
+              <a:t>OSINT directory is educational</a:t>
             </a:r>
           </a:p>
         </p:txBody>
@@ -6453,16 +5734,8 @@
           </a:bodyPr>
           <a:lstStyle/>
           <a:p>
-            <a:pPr algn="l">
-              <a:defRPr sz="1200" b="0">
-                <a:solidFill>
-                  <a:srgbClr val="9CA3AF"/>
-                </a:solidFill>
-                <a:latin typeface="Calibri"/>
-              </a:defRPr>
-            </a:pPr>
-            <a:r>
-              <a:t>Every vulnerability found comes from an actual HTTP test — no fake numbers or simulated results.</a:t>
+            <a:r>
+              <a:t>OSINT Explorer is a resource catalogue and learning interface only; it does not scrape, collect data, or bypass access controls.</a:t>
             </a:r>
           </a:p>
         </p:txBody>
@@ -6535,14 +5808,6 @@
           </a:bodyPr>
           <a:lstStyle/>
           <a:p>
-            <a:pPr algn="ctr">
-              <a:defRPr sz="1400" b="1">
-                <a:solidFill>
-                  <a:srgbClr val="EF4444"/>
-                </a:solidFill>
-                <a:latin typeface="Calibri"/>
-              </a:defRPr>
-            </a:pPr>
             <a:r>
               <a:t>5</a:t>
             </a:r>
@@ -6571,16 +5836,8 @@
           </a:bodyPr>
           <a:lstStyle/>
           <a:p>
-            <a:pPr algn="l">
-              <a:defRPr sz="1500" b="1">
-                <a:solidFill>
-                  <a:srgbClr val="FFFFFF"/>
-                </a:solidFill>
-                <a:latin typeface="Calibri"/>
-              </a:defRPr>
-            </a:pPr>
-            <a:r>
-              <a:t>Demo data is labeled</a:t>
+            <a:r>
+              <a:t>Respect provider terms and privacy</a:t>
             </a:r>
           </a:p>
         </p:txBody>
@@ -6607,16 +5864,8 @@
           </a:bodyPr>
           <a:lstStyle/>
           <a:p>
-            <a:pPr algn="l">
-              <a:defRPr sz="1200" b="0">
-                <a:solidFill>
-                  <a:srgbClr val="9CA3AF"/>
-                </a:solidFill>
-                <a:latin typeface="Calibri"/>
-              </a:defRPr>
-            </a:pPr>
-            <a:r>
-              <a:t>When something is pre-loaded sample data, it says 'DEMO DATA' clearly.</a:t>
+            <a:r>
+              <a:t>Geolocation and external resources may have rate limits, licensing, or policy constraints that must be checked independently.</a:t>
             </a:r>
           </a:p>
         </p:txBody>
@@ -6689,14 +5938,6 @@
           </a:bodyPr>
           <a:lstStyle/>
           <a:p>
-            <a:pPr algn="ctr">
-              <a:defRPr sz="1400" b="1">
-                <a:solidFill>
-                  <a:srgbClr val="EF4444"/>
-                </a:solidFill>
-                <a:latin typeface="Calibri"/>
-              </a:defRPr>
-            </a:pPr>
             <a:r>
               <a:t>6</a:t>
             </a:r>
@@ -6725,16 +5966,8 @@
           </a:bodyPr>
           <a:lstStyle/>
           <a:p>
-            <a:pPr algn="l">
-              <a:defRPr sz="1500" b="1">
-                <a:solidFill>
-                  <a:srgbClr val="FFFFFF"/>
-                </a:solidFill>
-                <a:latin typeface="Calibri"/>
-              </a:defRPr>
-            </a:pPr>
-            <a:r>
-              <a:t>Open source &amp; transparent</a:t>
+            <a:r>
+              <a:t>Use it responsibly</a:t>
             </a:r>
           </a:p>
         </p:txBody>
@@ -6761,16 +5994,8 @@
           </a:bodyPr>
           <a:lstStyle/>
           <a:p>
-            <a:pPr algn="l">
-              <a:defRPr sz="1200" b="0">
-                <a:solidFill>
-                  <a:srgbClr val="9CA3AF"/>
-                </a:solidFill>
-                <a:latin typeface="Calibri"/>
-              </a:defRPr>
-            </a:pPr>
-            <a:r>
-              <a:t>All code is visible. Judges can read any file to verify our claims.</a:t>
+            <a:r>
+              <a:t>The project supports learning and defensive review, not unauthorized scanning or surveillance.</a:t>
             </a:r>
           </a:p>
         </p:txBody>
@@ -6874,14 +6099,6 @@
           </a:bodyPr>
           <a:lstStyle/>
           <a:p>
-            <a:pPr algn="ctr">
-              <a:defRPr sz="4800" b="1">
-                <a:solidFill>
-                  <a:srgbClr val="FFFFFF"/>
-                </a:solidFill>
-                <a:latin typeface="Calibri"/>
-              </a:defRPr>
-            </a:pPr>
             <a:r>
               <a:t>Thank You!</a:t>
             </a:r>
@@ -6910,25 +6127,8 @@
           </a:bodyPr>
           <a:lstStyle/>
           <a:p>
-            <a:pPr algn="ctr">
-              <a:defRPr sz="2200" b="0">
-                <a:solidFill>
-                  <a:srgbClr val="22D3EE"/>
-                </a:solidFill>
-                <a:latin typeface="Calibri"/>
-              </a:defRPr>
-            </a:pPr>
-            <a:r>
-              <a:rPr lang="en-IN" dirty="0" err="1"/>
-              <a:t>Omnisec</a:t>
-            </a:r>
-            <a:r>
-              <a:rPr lang="en-IN" dirty="0"/>
-              <a:t> Analyzer</a:t>
-            </a:r>
-            <a:r>
-              <a:rPr dirty="0"/>
-              <a:t>— Detect. Analyze. Protect.</a:t>
+            <a:r>
+              <a:t>OmniSec Analyzer - Detect. Analyze. Protect.</a:t>
             </a:r>
           </a:p>
         </p:txBody>
@@ -6955,83 +6155,59 @@
           </a:bodyPr>
           <a:lstStyle/>
           <a:p>
-            <a:pPr>
-              <a:spcAft>
-                <a:spcPts val="750"/>
-              </a:spcAft>
-              <a:defRPr sz="1500" b="0">
-                <a:solidFill>
-                  <a:srgbClr val="D1D5DB"/>
-                </a:solidFill>
-                <a:latin typeface="Calibri"/>
-              </a:defRPr>
-            </a:pPr>
-            <a:r>
-              <a:t>✦  4 working modules — Geolocation, SQL Injection, OWASP Top 10, Rate Limiter</a:t>
-            </a:r>
-          </a:p>
-          <a:p>
-            <a:pPr>
-              <a:spcAft>
-                <a:spcPts val="750"/>
-              </a:spcAft>
-              <a:defRPr sz="1500" b="0">
-                <a:solidFill>
-                  <a:srgbClr val="D1D5DB"/>
-                </a:solidFill>
-                <a:latin typeface="Calibri"/>
-              </a:defRPr>
-            </a:pPr>
-            <a:r>
-              <a:t>✦  Full-stack app — React frontend + Node.js backend + SQLite database</a:t>
-            </a:r>
-          </a:p>
-          <a:p>
-            <a:pPr>
-              <a:spcAft>
-                <a:spcPts val="750"/>
-              </a:spcAft>
-              <a:defRPr sz="1500" b="0">
-                <a:solidFill>
-                  <a:srgbClr val="D1D5DB"/>
-                </a:solidFill>
-                <a:latin typeface="Calibri"/>
-              </a:defRPr>
-            </a:pPr>
-            <a:r>
-              <a:t>✦  100% local &amp; safe — no external websites are ever scanned</a:t>
-            </a:r>
-          </a:p>
-          <a:p>
-            <a:pPr>
-              <a:spcAft>
-                <a:spcPts val="750"/>
-              </a:spcAft>
-              <a:defRPr sz="1500" b="0">
-                <a:solidFill>
-                  <a:srgbClr val="D1D5DB"/>
-                </a:solidFill>
-                <a:latin typeface="Calibri"/>
-              </a:defRPr>
-            </a:pPr>
-            <a:r>
-              <a:t>✦  Real test results — every finding backed by actual HTTP evidence</a:t>
-            </a:r>
-          </a:p>
-          <a:p>
-            <a:pPr>
-              <a:spcAft>
-                <a:spcPts val="750"/>
-              </a:spcAft>
-              <a:defRPr sz="1500" b="0">
-                <a:solidFill>
-                  <a:srgbClr val="D1D5DB"/>
-                </a:solidFill>
-                <a:latin typeface="Calibri"/>
-              </a:defRPr>
-            </a:pPr>
-            <a:r>
-              <a:t>✦  Beginner-friendly — built to learn and demonstrate, not to attack</a:t>
+            <a:r>
+              <a:t>Added</a:t>
+            </a:r>
+          </a:p>
+          <a:p>
+            <a:r>
+              <a:t>- Identity Attack Paths</a:t>
+            </a:r>
+          </a:p>
+          <a:p>
+            <a:r>
+              <a:t>- OSINT Explorer</a:t>
+            </a:r>
+          </a:p>
+          <a:p>
+            <a:endParaRPr/>
+          </a:p>
+          <a:p>
+            <a:r>
+              <a:t>Removed</a:t>
+            </a:r>
+          </a:p>
+          <a:p>
+            <a:r>
+              <a:t>- API Rate Limit Tester</a:t>
+            </a:r>
+          </a:p>
+          <a:p>
+            <a:r>
+              <a:t>- Standalone API BOLA tester</a:t>
+            </a:r>
+          </a:p>
+          <a:p>
+            <a:endParaRPr/>
+          </a:p>
+          <a:p>
+            <a:r>
+              <a:t>Built for</a:t>
+            </a:r>
+          </a:p>
+          <a:p>
+            <a:r>
+              <a:t>- Safe learning</a:t>
+            </a:r>
+          </a:p>
+          <a:p>
+            <a:r>
+              <a:t>- Educational lab testing</a:t>
+            </a:r>
+          </a:p>
+          <a:p>
+            <a:r>
+              <a:t>- Authorized defensive analysis</a:t>
             </a:r>
           </a:p>
         </p:txBody>
@@ -7104,16 +6280,9 @@
           </a:bodyPr>
           <a:lstStyle/>
           <a:p>
-            <a:pPr algn="ctr">
-              <a:defRPr sz="1400" b="1">
-                <a:solidFill>
-                  <a:srgbClr val="A78BFA"/>
-                </a:solidFill>
-                <a:latin typeface="Calibri"/>
-              </a:defRPr>
-            </a:pPr>
-            <a:r>
-              <a:t>Questions?  We'd love to explain any part in detail.</a:t>
+            <a:r>
+              <a:rPr dirty="0"/>
+              <a:t>Questions? We would be happy to explain any part in detail.</a:t>
             </a:r>
           </a:p>
         </p:txBody>
